--- a/Strategy_Sarsabz_Sep/workspace/out/Sarsabz_case2_deck-v4.pptx
+++ b/Strategy_Sarsabz_Sep/workspace/out/Sarsabz_case2_deck-v4.pptx
@@ -337,7 +337,7 @@
           <a:p>
             <a:fld id="{5BCAD085-E8A6-8845-BD4E-CB4CCA059FC4}" type="datetimeFigureOut">
               <a:rPr lang="en-US" smtClean="0"/>
-              <a:t>9/15/2026</a:t>
+              <a:t>9/16/2026</a:t>
             </a:fld>
             <a:endParaRPr lang="en-US"/>
           </a:p>
@@ -505,7 +505,7 @@
           <a:p>
             <a:fld id="{5BCAD085-E8A6-8845-BD4E-CB4CCA059FC4}" type="datetimeFigureOut">
               <a:rPr lang="en-US" smtClean="0"/>
-              <a:t>9/15/2026</a:t>
+              <a:t>9/16/2026</a:t>
             </a:fld>
             <a:endParaRPr lang="en-US"/>
           </a:p>
@@ -683,7 +683,7 @@
           <a:p>
             <a:fld id="{5BCAD085-E8A6-8845-BD4E-CB4CCA059FC4}" type="datetimeFigureOut">
               <a:rPr lang="en-US" smtClean="0"/>
-              <a:t>9/15/2026</a:t>
+              <a:t>9/16/2026</a:t>
             </a:fld>
             <a:endParaRPr lang="en-US"/>
           </a:p>
@@ -851,7 +851,7 @@
           <a:p>
             <a:fld id="{5BCAD085-E8A6-8845-BD4E-CB4CCA059FC4}" type="datetimeFigureOut">
               <a:rPr lang="en-US" smtClean="0"/>
-              <a:t>9/15/2026</a:t>
+              <a:t>9/16/2026</a:t>
             </a:fld>
             <a:endParaRPr lang="en-US"/>
           </a:p>
@@ -1096,7 +1096,7 @@
           <a:p>
             <a:fld id="{5BCAD085-E8A6-8845-BD4E-CB4CCA059FC4}" type="datetimeFigureOut">
               <a:rPr lang="en-US" smtClean="0"/>
-              <a:t>9/15/2026</a:t>
+              <a:t>9/16/2026</a:t>
             </a:fld>
             <a:endParaRPr lang="en-US"/>
           </a:p>
@@ -1381,7 +1381,7 @@
           <a:p>
             <a:fld id="{5BCAD085-E8A6-8845-BD4E-CB4CCA059FC4}" type="datetimeFigureOut">
               <a:rPr lang="en-US" smtClean="0"/>
-              <a:t>9/15/2026</a:t>
+              <a:t>9/16/2026</a:t>
             </a:fld>
             <a:endParaRPr lang="en-US"/>
           </a:p>
@@ -1800,7 +1800,7 @@
           <a:p>
             <a:fld id="{5BCAD085-E8A6-8845-BD4E-CB4CCA059FC4}" type="datetimeFigureOut">
               <a:rPr lang="en-US" smtClean="0"/>
-              <a:t>9/15/2026</a:t>
+              <a:t>9/16/2026</a:t>
             </a:fld>
             <a:endParaRPr lang="en-US"/>
           </a:p>
@@ -1917,7 +1917,7 @@
           <a:p>
             <a:fld id="{5BCAD085-E8A6-8845-BD4E-CB4CCA059FC4}" type="datetimeFigureOut">
               <a:rPr lang="en-US" smtClean="0"/>
-              <a:t>9/15/2026</a:t>
+              <a:t>9/16/2026</a:t>
             </a:fld>
             <a:endParaRPr lang="en-US"/>
           </a:p>
@@ -2012,7 +2012,7 @@
           <a:p>
             <a:fld id="{5BCAD085-E8A6-8845-BD4E-CB4CCA059FC4}" type="datetimeFigureOut">
               <a:rPr lang="en-US" smtClean="0"/>
-              <a:t>9/15/2026</a:t>
+              <a:t>9/16/2026</a:t>
             </a:fld>
             <a:endParaRPr lang="en-US"/>
           </a:p>
@@ -2287,7 +2287,7 @@
           <a:p>
             <a:fld id="{5BCAD085-E8A6-8845-BD4E-CB4CCA059FC4}" type="datetimeFigureOut">
               <a:rPr lang="en-US" smtClean="0"/>
-              <a:t>9/15/2026</a:t>
+              <a:t>9/16/2026</a:t>
             </a:fld>
             <a:endParaRPr lang="en-US"/>
           </a:p>
@@ -2539,7 +2539,7 @@
           <a:p>
             <a:fld id="{5BCAD085-E8A6-8845-BD4E-CB4CCA059FC4}" type="datetimeFigureOut">
               <a:rPr lang="en-US" smtClean="0"/>
-              <a:t>9/15/2026</a:t>
+              <a:t>9/16/2026</a:t>
             </a:fld>
             <a:endParaRPr lang="en-US"/>
           </a:p>
@@ -2750,7 +2750,7 @@
           <a:p>
             <a:fld id="{5BCAD085-E8A6-8845-BD4E-CB4CCA059FC4}" type="datetimeFigureOut">
               <a:rPr lang="en-US" smtClean="0"/>
-              <a:t>9/15/2026</a:t>
+              <a:t>9/16/2026</a:t>
             </a:fld>
             <a:endParaRPr lang="en-US"/>
           </a:p>
@@ -8364,7 +8364,7 @@
         <p:spPr>
           <a:xfrm>
             <a:off x="502920" y="1371600"/>
-            <a:ext cx="6126480" cy="3879605"/>
+            <a:ext cx="5824138" cy="3879605"/>
           </a:xfrm>
           <a:prstGeom prst="rect">
             <a:avLst/>
@@ -8869,7 +8869,7 @@
         <p:spPr>
           <a:xfrm>
             <a:off x="502920" y="1371600"/>
-            <a:ext cx="6126480" cy="3879605"/>
+            <a:ext cx="6036336" cy="4187067"/>
           </a:xfrm>
           <a:prstGeom prst="rect">
             <a:avLst/>
